--- a/docs/presentations/exp002_kitagi_foss4g2026_presentation.pptx
+++ b/docs/presentations/exp002_kitagi_foss4g2026_presentation.pptx
@@ -3135,7 +3135,63 @@
       </p:sp>
       <p:sp>
         <p:nvSpPr>
-          <p:cNvPr id="3" name="SlideNumber"/>
+          <p:cNvPr id="3" name="Body"/>
+          <p:cNvSpPr txBox="1"/>
+          <p:nvPr/>
+        </p:nvSpPr>
+        <p:spPr>
+          <a:xfrm>
+            <a:off x="502920" y="2011680"/>
+            <a:ext cx="11186160" cy="4389120"/>
+          </a:xfrm>
+          <a:prstGeom prst="rect">
+            <a:avLst/>
+          </a:prstGeom>
+          <a:noFill/>
+        </p:spPr>
+        <p:txBody>
+          <a:bodyPr wrap="square">
+            <a:spAutoFit/>
+          </a:bodyPr>
+          <a:lstStyle/>
+          <a:p>
+            <a:pPr algn="l"/>
+            <a:r>
+              <a:rPr sz="1700" b="0">
+                <a:solidFill>
+                  <a:srgbClr val="2B2B2B"/>
+                </a:solidFill>
+              </a:rPr>
+              <a:t>Noboru Otsuka — Geolonia Inc.</a:t>
+            </a:r>
+          </a:p>
+          <a:p>
+            <a:pPr algn="l"/>
+            <a:r>
+              <a:rPr sz="1700" b="0">
+                <a:solidFill>
+                  <a:srgbClr val="2B2B2B"/>
+                </a:solidFill>
+              </a:rPr>
+              <a:t>FOSS4G 2026 Hiroshima</a:t>
+            </a:r>
+          </a:p>
+          <a:p>
+            <a:pPr algn="l"/>
+            <a:r>
+              <a:rPr sz="1700" b="0">
+                <a:solidFill>
+                  <a:srgbClr val="2B2B2B"/>
+                </a:solidFill>
+              </a:rPr>
+              <a:t>2026-09-02 13:30 · Himawari</a:t>
+            </a:r>
+          </a:p>
+        </p:txBody>
+      </p:sp>
+      <p:sp>
+        <p:nvSpPr>
+          <p:cNvPr id="4" name="SlideNumber"/>
           <p:cNvSpPr txBox="1"/>
           <p:nvPr/>
         </p:nvSpPr>
@@ -3221,7 +3277,74 @@
       </p:sp>
       <p:sp>
         <p:nvSpPr>
-          <p:cNvPr id="3" name="SlideNumber"/>
+          <p:cNvPr id="3" name="Body"/>
+          <p:cNvSpPr txBox="1"/>
+          <p:nvPr/>
+        </p:nvSpPr>
+        <p:spPr>
+          <a:xfrm>
+            <a:off x="502920" y="2011680"/>
+            <a:ext cx="11186160" cy="4389120"/>
+          </a:xfrm>
+          <a:prstGeom prst="rect">
+            <a:avLst/>
+          </a:prstGeom>
+          <a:noFill/>
+        </p:spPr>
+        <p:txBody>
+          <a:bodyPr wrap="square">
+            <a:spAutoFit/>
+          </a:bodyPr>
+          <a:lstStyle/>
+          <a:p>
+            <a:pPr algn="l"/>
+            <a:r>
+              <a:rPr sz="1700" b="0">
+                <a:solidFill>
+                  <a:srgbClr val="2B2B2B"/>
+                </a:solidFill>
+              </a:rPr>
+              <a:t>10 m resolution — ponds narrower than about 10 m are unreliable</a:t>
+            </a:r>
+          </a:p>
+          <a:p>
+            <a:pPr algn="l"/>
+            <a:r>
+              <a:rPr sz="1700" b="0">
+                <a:solidFill>
+                  <a:srgbClr val="2B2B2B"/>
+                </a:solidFill>
+              </a:rPr>
+              <a:t>Thresholds below zero admit dark rock and shadow</a:t>
+            </a:r>
+          </a:p>
+          <a:p>
+            <a:pPr algn="l"/>
+            <a:r>
+              <a:rPr sz="1700" b="0">
+                <a:solidFill>
+                  <a:srgbClr val="2B2B2B"/>
+                </a:solidFill>
+              </a:rPr>
+              <a:t>No precision or recall — field validation not done</a:t>
+            </a:r>
+          </a:p>
+          <a:p>
+            <a:pPr algn="l"/>
+            <a:r>
+              <a:rPr sz="1700" b="0">
+                <a:solidFill>
+                  <a:srgbClr val="2B2B2B"/>
+                </a:solidFill>
+              </a:rPr>
+              <a:t>Next: walk the candidates · a land mask for the shoreline · higher-resolution imagery</a:t>
+            </a:r>
+          </a:p>
+        </p:txBody>
+      </p:sp>
+      <p:sp>
+        <p:nvSpPr>
+          <p:cNvPr id="4" name="SlideNumber"/>
           <p:cNvSpPr txBox="1"/>
           <p:nvPr/>
         </p:nvSpPr>
@@ -3307,7 +3430,119 @@
       </p:sp>
       <p:sp>
         <p:nvSpPr>
-          <p:cNvPr id="3" name="SlideNumber"/>
+          <p:cNvPr id="3" name="Body"/>
+          <p:cNvSpPr txBox="1"/>
+          <p:nvPr/>
+        </p:nvSpPr>
+        <p:spPr>
+          <a:xfrm>
+            <a:off x="502920" y="2011680"/>
+            <a:ext cx="11186160" cy="4023360"/>
+          </a:xfrm>
+          <a:prstGeom prst="rect">
+            <a:avLst/>
+          </a:prstGeom>
+          <a:noFill/>
+        </p:spPr>
+        <p:txBody>
+          <a:bodyPr wrap="square">
+            <a:spAutoFit/>
+          </a:bodyPr>
+          <a:lstStyle/>
+          <a:p>
+            <a:pPr algn="l"/>
+            <a:r>
+              <a:rPr sz="1700" b="0">
+                <a:solidFill>
+                  <a:srgbClr val="2B2B2B"/>
+                </a:solidFill>
+              </a:rPr>
+              <a:t>Published — 145 detected polygons as GeoJSON · EPSG:4326</a:t>
+            </a:r>
+          </a:p>
+          <a:p>
+            <a:pPr algn="l"/>
+            <a:r>
+              <a:rPr sz="1700" b="0">
+                <a:solidFill>
+                  <a:srgbClr val="2B2B2B"/>
+                </a:solidFill>
+              </a:rPr>
+              <a:t>Pipeline outputs — GeoJSON and GeoTIFF for fieldwork and heritage documentation</a:t>
+            </a:r>
+          </a:p>
+          <a:p>
+            <a:pPr algn="l"/>
+            <a:r>
+              <a:rPr sz="1700" b="0">
+                <a:solidFill>
+                  <a:srgbClr val="2B2B2B"/>
+                </a:solidFill>
+              </a:rPr>
+              <a:t>Open-source Python pipeline · no licence fee, no imagery purchase</a:t>
+            </a:r>
+          </a:p>
+          <a:p>
+            <a:pPr algn="l"/>
+            <a:r>
+              <a:rPr sz="1700" b="0">
+                <a:solidFill>
+                  <a:srgbClr val="2B2B2B"/>
+                </a:solidFill>
+              </a:rPr>
+              <a:t>The same workflow could be extended to other quarried islands in the Seto Inland Sea.</a:t>
+            </a:r>
+          </a:p>
+        </p:txBody>
+      </p:sp>
+      <p:sp>
+        <p:nvSpPr>
+          <p:cNvPr id="4" name="Footer"/>
+          <p:cNvSpPr txBox="1"/>
+          <p:nvPr/>
+        </p:nvSpPr>
+        <p:spPr>
+          <a:xfrm>
+            <a:off x="502920" y="6291072"/>
+            <a:ext cx="10363200" cy="475488"/>
+          </a:xfrm>
+          <a:prstGeom prst="rect">
+            <a:avLst/>
+          </a:prstGeom>
+          <a:noFill/>
+        </p:spPr>
+        <p:txBody>
+          <a:bodyPr wrap="square">
+            <a:spAutoFit/>
+          </a:bodyPr>
+          <a:lstStyle/>
+          <a:p>
+            <a:pPr algn="l"/>
+            <a:r>
+              <a:rPr sz="1100">
+                <a:solidFill>
+                  <a:srgbClr val="5A564E"/>
+                </a:solidFill>
+              </a:rPr>
+              <a:t>rasterio · numpy · shapely · pystac-client · planetary-computer · folium</a:t>
+            </a:r>
+          </a:p>
+          <a:p>
+            <a:pPr algn="l"/>
+            <a:r>
+              <a:rPr sz="1100">
+                <a:solidFill>
+                  <a:srgbClr val="5A564E"/>
+                </a:solidFill>
+              </a:rPr>
+              <a:t>Contains modified Copernicus Sentinel data [2025]. Basemaps: GSI Tiles, Geospatial Information Authority of Japan. CC BY 4.0.</a:t>
+            </a:r>
+          </a:p>
+        </p:txBody>
+      </p:sp>
+      <p:sp>
+        <p:nvSpPr>
+          <p:cNvPr id="5" name="SlideNumber"/>
           <p:cNvSpPr txBox="1"/>
           <p:nvPr/>
         </p:nvSpPr>
@@ -3393,7 +3628,96 @@
       </p:sp>
       <p:sp>
         <p:nvSpPr>
-          <p:cNvPr id="3" name="SlideNumber"/>
+          <p:cNvPr id="3" name="Body"/>
+          <p:cNvSpPr txBox="1"/>
+          <p:nvPr/>
+        </p:nvSpPr>
+        <p:spPr>
+          <a:xfrm>
+            <a:off x="502920" y="2011680"/>
+            <a:ext cx="11186160" cy="4389120"/>
+          </a:xfrm>
+          <a:prstGeom prst="rect">
+            <a:avLst/>
+          </a:prstGeom>
+          <a:noFill/>
+        </p:spPr>
+        <p:txBody>
+          <a:bodyPr wrap="square">
+            <a:spAutoFit/>
+          </a:bodyPr>
+          <a:lstStyle/>
+          <a:p>
+            <a:pPr algn="l"/>
+            <a:r>
+              <a:rPr sz="1700" b="0">
+                <a:solidFill>
+                  <a:srgbClr val="2B2B2B"/>
+                </a:solidFill>
+              </a:rPr>
+              <a:t>Satellite scan → a finite candidate list</a:t>
+            </a:r>
+          </a:p>
+          <a:p>
+            <a:pPr algn="l"/>
+            <a:r>
+              <a:rPr sz="1700" b="0">
+                <a:solidFill>
+                  <a:srgbClr val="2B2B2B"/>
+                </a:solidFill>
+              </a:rPr>
+              <a:t>Field visit → see it with your own eyes</a:t>
+            </a:r>
+          </a:p>
+          <a:p>
+            <a:pPr algn="l"/>
+            <a:r>
+              <a:rPr sz="1700" b="0">
+                <a:solidFill>
+                  <a:srgbClr val="2B2B2B"/>
+                </a:solidFill>
+              </a:rPr>
+              <a:t>OpenStreetMap → put what you confirmed on the public map</a:t>
+            </a:r>
+          </a:p>
+          <a:p>
+            <a:pPr algn="l"/>
+            <a:r>
+              <a:rPr sz="1700" b="0">
+                <a:solidFill>
+                  <a:srgbClr val="2B2B2B"/>
+                </a:solidFill>
+              </a:rPr>
+              <a:t>I plan to contribute the ponds I can confirm.</a:t>
+            </a:r>
+          </a:p>
+          <a:p>
+            <a:pPr algn="l"/>
+            <a:r>
+              <a:rPr sz="1700" b="0">
+                <a:solidFill>
+                  <a:srgbClr val="2B2B2B"/>
+                </a:solidFill>
+              </a:rPr>
+              <a:t>The March mapping party added features observed on the ground. The scan suggests where to look next.</a:t>
+            </a:r>
+          </a:p>
+          <a:p>
+            <a:pPr algn="l"/>
+            <a:r>
+              <a:rPr sz="1700" b="0">
+                <a:solidFill>
+                  <a:srgbClr val="2B2B2B"/>
+                </a:solidFill>
+              </a:rPr>
+              <a:t>Thank you · Q&amp;A</a:t>
+            </a:r>
+          </a:p>
+        </p:txBody>
+      </p:sp>
+      <p:sp>
+        <p:nvSpPr>
+          <p:cNvPr id="4" name="SlideNumber"/>
           <p:cNvSpPr txBox="1"/>
           <p:nvPr/>
         </p:nvSpPr>
@@ -3479,7 +3803,107 @@
       </p:sp>
       <p:sp>
         <p:nvSpPr>
-          <p:cNvPr id="3" name="SlideNumber"/>
+          <p:cNvPr id="3" name="Body"/>
+          <p:cNvSpPr txBox="1"/>
+          <p:nvPr/>
+        </p:nvSpPr>
+        <p:spPr>
+          <a:xfrm>
+            <a:off x="502920" y="2011680"/>
+            <a:ext cx="11186160" cy="4389120"/>
+          </a:xfrm>
+          <a:prstGeom prst="rect">
+            <a:avLst/>
+          </a:prstGeom>
+          <a:noFill/>
+        </p:spPr>
+        <p:txBody>
+          <a:bodyPr wrap="square">
+            <a:spAutoFit/>
+          </a:bodyPr>
+          <a:lstStyle/>
+          <a:p>
+            <a:pPr algn="l"/>
+            <a:r>
+              <a:rPr sz="1700" b="0">
+                <a:solidFill>
+                  <a:srgbClr val="2B2B2B"/>
+                </a:solidFill>
+              </a:rPr>
+              <a:t>Kitagi Island · Kasaoka City, Okayama · Seto Inland Sea</a:t>
+            </a:r>
+          </a:p>
+          <a:p>
+            <a:pPr algn="l"/>
+            <a:r>
+              <a:rPr sz="1700" b="0">
+                <a:solidFill>
+                  <a:srgbClr val="2B2B2B"/>
+                </a:solidFill>
+              </a:rPr>
+              <a:t>Granite quarried since the early 17th century</a:t>
+            </a:r>
+          </a:p>
+          <a:p>
+            <a:pPr algn="l"/>
+            <a:r>
+              <a:rPr sz="1700" b="0">
+                <a:solidFill>
+                  <a:srgbClr val="2B2B2B"/>
+                </a:solidFill>
+              </a:rPr>
+              <a:t>127 active quarry sites at the 1957 peak · up to 12,000 residents</a:t>
+            </a:r>
+          </a:p>
+          <a:p>
+            <a:pPr algn="l"/>
+            <a:r>
+              <a:rPr sz="1700" b="0">
+                <a:solidFill>
+                  <a:srgbClr val="2B2B2B"/>
+                </a:solidFill>
+              </a:rPr>
+              <a:t>Today: two working quarries · about 600–700 residents</a:t>
+            </a:r>
+          </a:p>
+          <a:p>
+            <a:pPr algn="l"/>
+            <a:r>
+              <a:rPr sz="1700" b="0">
+                <a:solidFill>
+                  <a:srgbClr val="2B2B2B"/>
+                </a:solidFill>
+              </a:rPr>
+              <a:t>Abandoned pits filled with rain and groundwater</a:t>
+            </a:r>
+          </a:p>
+          <a:p>
+            <a:pPr algn="l"/>
+            <a:r>
+              <a:rPr sz="1700" b="0">
+                <a:solidFill>
+                  <a:srgbClr val="2B2B2B"/>
+                </a:solidFill>
+              </a:rPr>
+              <a:t>National heritage since 2019 — "Stone Islands of Setouchi"</a:t>
+            </a:r>
+          </a:p>
+          <a:p>
+            <a:pPr algn="l"/>
+            <a:r>
+              <a:rPr sz="1700" b="0">
+                <a:solidFill>
+                  <a:srgbClr val="2B2B2B"/>
+                </a:solidFill>
+              </a:rPr>
+              <a:t>I found no island-wide record of the ponds themselves.</a:t>
+            </a:r>
+          </a:p>
+        </p:txBody>
+      </p:sp>
+      <p:sp>
+        <p:nvSpPr>
+          <p:cNvPr id="4" name="SlideNumber"/>
           <p:cNvSpPr txBox="1"/>
           <p:nvPr/>
         </p:nvSpPr>
@@ -3565,7 +3989,85 @@
       </p:sp>
       <p:sp>
         <p:nvSpPr>
-          <p:cNvPr id="3" name="SlideNumber"/>
+          <p:cNvPr id="3" name="Body"/>
+          <p:cNvSpPr txBox="1"/>
+          <p:nvPr/>
+        </p:nvSpPr>
+        <p:spPr>
+          <a:xfrm>
+            <a:off x="502920" y="2011680"/>
+            <a:ext cx="11186160" cy="4389120"/>
+          </a:xfrm>
+          <a:prstGeom prst="rect">
+            <a:avLst/>
+          </a:prstGeom>
+          <a:noFill/>
+        </p:spPr>
+        <p:txBody>
+          <a:bodyPr wrap="square">
+            <a:spAutoFit/>
+          </a:bodyPr>
+          <a:lstStyle/>
+          <a:p>
+            <a:pPr algn="l"/>
+            <a:r>
+              <a:rPr sz="1700" b="0">
+                <a:solidFill>
+                  <a:srgbClr val="2B2B2B"/>
+                </a:solidFill>
+              </a:rPr>
+              <a:t>March 2026 — a drone mapping party on the island</a:t>
+            </a:r>
+          </a:p>
+          <a:p>
+            <a:pPr algn="l"/>
+            <a:r>
+              <a:rPr sz="1700" b="0">
+                <a:solidFill>
+                  <a:srgbClr val="2B2B2B"/>
+                </a:solidFill>
+              </a:rPr>
+              <a:t>Vertical granite walls, cut not weathered</a:t>
+            </a:r>
+          </a:p>
+          <a:p>
+            <a:pPr algn="l"/>
+            <a:r>
+              <a:rPr sz="1700" b="0">
+                <a:solidFill>
+                  <a:srgbClr val="2B2B2B"/>
+                </a:solidFill>
+              </a:rPr>
+              <a:t>Water in an unusual green; reported depths of a few metres to about twenty</a:t>
+            </a:r>
+          </a:p>
+          <a:p>
+            <a:pPr algn="l"/>
+            <a:r>
+              <a:rPr sz="1700" b="0">
+                <a:solidFill>
+                  <a:srgbClr val="2B2B2B"/>
+                </a:solidFill>
+              </a:rPr>
+              <a:t>A stage on the water, built from leftover stone</a:t>
+            </a:r>
+          </a:p>
+          <a:p>
+            <a:pPr algn="l"/>
+            <a:r>
+              <a:rPr sz="1700" b="0">
+                <a:solidFill>
+                  <a:srgbClr val="2B2B2B"/>
+                </a:solidFill>
+              </a:rPr>
+              <a:t>Five or six sites during the event.</a:t>
+            </a:r>
+          </a:p>
+        </p:txBody>
+      </p:sp>
+      <p:sp>
+        <p:nvSpPr>
+          <p:cNvPr id="4" name="SlideNumber"/>
           <p:cNvSpPr txBox="1"/>
           <p:nvPr/>
         </p:nvSpPr>
@@ -3651,7 +4153,85 @@
       </p:sp>
       <p:sp>
         <p:nvSpPr>
-          <p:cNvPr id="3" name="SlideNumber"/>
+          <p:cNvPr id="3" name="Body"/>
+          <p:cNvSpPr txBox="1"/>
+          <p:nvPr/>
+        </p:nvSpPr>
+        <p:spPr>
+          <a:xfrm>
+            <a:off x="502920" y="2011680"/>
+            <a:ext cx="11186160" cy="4389120"/>
+          </a:xfrm>
+          <a:prstGeom prst="rect">
+            <a:avLst/>
+          </a:prstGeom>
+          <a:noFill/>
+        </p:spPr>
+        <p:txBody>
+          <a:bodyPr wrap="square">
+            <a:spAutoFit/>
+          </a:bodyPr>
+          <a:lstStyle/>
+          <a:p>
+            <a:pPr algn="l"/>
+            <a:r>
+              <a:rPr sz="1700" b="0">
+                <a:solidFill>
+                  <a:srgbClr val="2B2B2B"/>
+                </a:solidFill>
+              </a:rPr>
+              <a:t>Drone flown from the stage on the water</a:t>
+            </a:r>
+          </a:p>
+          <a:p>
+            <a:pPr algn="l"/>
+            <a:r>
+              <a:rPr sz="1700" b="0">
+                <a:solidFill>
+                  <a:srgbClr val="2B2B2B"/>
+                </a:solidFill>
+              </a:rPr>
+              <a:t>Grey rectangles cut into the green canopy</a:t>
+            </a:r>
+          </a:p>
+          <a:p>
+            <a:pPr algn="l"/>
+            <a:r>
+              <a:rPr sz="1700" b="0">
+                <a:solidFill>
+                  <a:srgbClr val="2B2B2B"/>
+                </a:solidFill>
+              </a:rPr>
+              <a:t>Between two quarries, a thin wall left standing</a:t>
+            </a:r>
+          </a:p>
+          <a:p>
+            <a:pPr algn="l"/>
+            <a:r>
+              <a:rPr sz="1700" b="0">
+                <a:solidFill>
+                  <a:srgbClr val="2B2B2B"/>
+                </a:solidFill>
+              </a:rPr>
+              <a:t>A property line, standing as terrain</a:t>
+            </a:r>
+          </a:p>
+          <a:p>
+            <a:pPr algn="l"/>
+            <a:r>
+              <a:rPr sz="1700" b="0">
+                <a:solidFill>
+                  <a:srgbClr val="2B2B2B"/>
+                </a:solidFill>
+              </a:rPr>
+              <a:t>The same event added features to OpenStreetMap.</a:t>
+            </a:r>
+          </a:p>
+        </p:txBody>
+      </p:sp>
+      <p:sp>
+        <p:nvSpPr>
+          <p:cNvPr id="4" name="SlideNumber"/>
           <p:cNvSpPr txBox="1"/>
           <p:nvPr/>
         </p:nvSpPr>
@@ -3737,7 +4317,96 @@
       </p:sp>
       <p:sp>
         <p:nvSpPr>
-          <p:cNvPr id="3" name="SlideNumber"/>
+          <p:cNvPr id="3" name="Body"/>
+          <p:cNvSpPr txBox="1"/>
+          <p:nvPr/>
+        </p:nvSpPr>
+        <p:spPr>
+          <a:xfrm>
+            <a:off x="502920" y="2011680"/>
+            <a:ext cx="11186160" cy="4389120"/>
+          </a:xfrm>
+          <a:prstGeom prst="rect">
+            <a:avLst/>
+          </a:prstGeom>
+          <a:noFill/>
+        </p:spPr>
+        <p:txBody>
+          <a:bodyPr wrap="square">
+            <a:spAutoFit/>
+          </a:bodyPr>
+          <a:lstStyle/>
+          <a:p>
+            <a:pPr algn="l"/>
+            <a:r>
+              <a:rPr sz="1700" b="0">
+                <a:solidFill>
+                  <a:srgbClr val="2B2B2B"/>
+                </a:solidFill>
+              </a:rPr>
+              <a:t>Sentinel-2 L2A via the Microsoft Planetary Computer STAC API</a:t>
+            </a:r>
+          </a:p>
+          <a:p>
+            <a:pPr algn="l"/>
+            <a:r>
+              <a:rPr sz="1700" b="0">
+                <a:solidFill>
+                  <a:srgbClr val="2B2B2B"/>
+                </a:solidFill>
+              </a:rPr>
+              <a:t>Summer 2025-08-02 · 0.7% cloud · 10 m analysis grid</a:t>
+            </a:r>
+          </a:p>
+          <a:p>
+            <a:pPr algn="l"/>
+            <a:r>
+              <a:rPr sz="1700" b="0">
+                <a:solidFill>
+                  <a:srgbClr val="2B2B2B"/>
+                </a:solidFill>
+              </a:rPr>
+              <a:t>Water if (NDWI &gt; −0.2 OR MNDWI &gt; −0.1) AND NOT (NDVI &gt; 0.3)</a:t>
+            </a:r>
+          </a:p>
+          <a:p>
+            <a:pPr algn="l"/>
+            <a:r>
+              <a:rPr sz="1700" b="0">
+                <a:solidFill>
+                  <a:srgbClr val="2B2B2B"/>
+                </a:solidFill>
+              </a:rPr>
+              <a:t>Thresholds below zero: at 10 m a narrow pond is part water, part granite, part shadow</a:t>
+            </a:r>
+          </a:p>
+          <a:p>
+            <a:pPr algn="l"/>
+            <a:r>
+              <a:rPr sz="1700" b="0">
+                <a:solidFill>
+                  <a:srgbClr val="2B2B2B"/>
+                </a:solidFill>
+              </a:rPr>
+              <a:t>A standard water-index workflow — nothing new in the method</a:t>
+            </a:r>
+          </a:p>
+          <a:p>
+            <a:pPr algn="l"/>
+            <a:r>
+              <a:rPr sz="1700" b="0">
+                <a:solidFill>
+                  <a:srgbClr val="2B2B2B"/>
+                </a:solidFill>
+              </a:rPr>
+              <a:t>Minimum reported polygon area: 100 m²</a:t>
+            </a:r>
+          </a:p>
+        </p:txBody>
+      </p:sp>
+      <p:sp>
+        <p:nvSpPr>
+          <p:cNvPr id="4" name="SlideNumber"/>
           <p:cNvSpPr txBox="1"/>
           <p:nvPr/>
         </p:nvSpPr>
@@ -3823,7 +4492,153 @@
       </p:sp>
       <p:sp>
         <p:nvSpPr>
-          <p:cNvPr id="3" name="SlideNumber"/>
+          <p:cNvPr id="3" name="Body"/>
+          <p:cNvSpPr txBox="1"/>
+          <p:nvPr/>
+        </p:nvSpPr>
+        <p:spPr>
+          <a:xfrm>
+            <a:off x="502920" y="2011680"/>
+            <a:ext cx="2926080" cy="1188720"/>
+          </a:xfrm>
+          <a:prstGeom prst="rect">
+            <a:avLst/>
+          </a:prstGeom>
+          <a:noFill/>
+        </p:spPr>
+        <p:txBody>
+          <a:bodyPr wrap="square">
+            <a:spAutoFit/>
+          </a:bodyPr>
+          <a:lstStyle/>
+          <a:p>
+            <a:pPr algn="l"/>
+            <a:r>
+              <a:rPr sz="6600" b="1">
+                <a:solidFill>
+                  <a:srgbClr val="0D47A1"/>
+                </a:solidFill>
+              </a:rPr>
+              <a:t>145</a:t>
+            </a:r>
+          </a:p>
+        </p:txBody>
+      </p:sp>
+      <p:sp>
+        <p:nvSpPr>
+          <p:cNvPr id="4" name="Body"/>
+          <p:cNvSpPr txBox="1"/>
+          <p:nvPr/>
+        </p:nvSpPr>
+        <p:spPr>
+          <a:xfrm>
+            <a:off x="502920" y="3291840"/>
+            <a:ext cx="11186160" cy="2743200"/>
+          </a:xfrm>
+          <a:prstGeom prst="rect">
+            <a:avLst/>
+          </a:prstGeom>
+          <a:noFill/>
+        </p:spPr>
+        <p:txBody>
+          <a:bodyPr wrap="square">
+            <a:spAutoFit/>
+          </a:bodyPr>
+          <a:lstStyle/>
+          <a:p>
+            <a:pPr algn="l"/>
+            <a:r>
+              <a:rPr sz="1700" b="0">
+                <a:solidFill>
+                  <a:srgbClr val="2B2B2B"/>
+                </a:solidFill>
+              </a:rPr>
+              <a:t>intra-island water polygons ≥ 100 m², summer 2025-08-02</a:t>
+            </a:r>
+          </a:p>
+          <a:p>
+            <a:pPr algn="l"/>
+            <a:r>
+              <a:rPr sz="1700" b="0">
+                <a:solidFill>
+                  <a:srgbClr val="2B2B2B"/>
+                </a:solidFill>
+              </a:rPr>
+              <a:t>Clustered in the north, south-east, centre and west — consistent with historical quarrying records</a:t>
+            </a:r>
+          </a:p>
+          <a:p>
+            <a:pPr algn="l"/>
+            <a:r>
+              <a:rPr sz="1700" b="0">
+                <a:solidFill>
+                  <a:srgbClr val="2B2B2B"/>
+                </a:solidFill>
+              </a:rPr>
+              <a:t>145 detections vs 127 recorded quarry sites — a comparison of scale, not a one-to-one match</a:t>
+            </a:r>
+          </a:p>
+          <a:p>
+            <a:pPr algn="l"/>
+            <a:r>
+              <a:rPr sz="1500" b="0">
+                <a:solidFill>
+                  <a:srgbClr val="2B2B2B"/>
+                </a:solidFill>
+              </a:rPr>
+              <a:t>Spring 2025-03-23 — 113 polygons reported</a:t>
+            </a:r>
+          </a:p>
+          <a:p>
+            <a:pPr algn="l"/>
+            <a:r>
+              <a:rPr sz="1700" b="0">
+                <a:solidFill>
+                  <a:srgbClr val="2B2B2B"/>
+                </a:solidFill>
+              </a:rPr>
+              <a:t>These are detected water polygons, not individually field-confirmed quarry ponds.</a:t>
+            </a:r>
+          </a:p>
+        </p:txBody>
+      </p:sp>
+      <p:sp>
+        <p:nvSpPr>
+          <p:cNvPr id="5" name="Footer"/>
+          <p:cNvSpPr txBox="1"/>
+          <p:nvPr/>
+        </p:nvSpPr>
+        <p:spPr>
+          <a:xfrm>
+            <a:off x="502920" y="6492240"/>
+            <a:ext cx="10363200" cy="274320"/>
+          </a:xfrm>
+          <a:prstGeom prst="rect">
+            <a:avLst/>
+          </a:prstGeom>
+          <a:noFill/>
+        </p:spPr>
+        <p:txBody>
+          <a:bodyPr wrap="square">
+            <a:spAutoFit/>
+          </a:bodyPr>
+          <a:lstStyle/>
+          <a:p>
+            <a:pPr algn="l"/>
+            <a:r>
+              <a:rPr sz="1100">
+                <a:solidFill>
+                  <a:srgbClr val="5A564E"/>
+                </a:solidFill>
+              </a:rPr>
+              <a:t>Contains modified Copernicus Sentinel data [2025].</a:t>
+            </a:r>
+          </a:p>
+        </p:txBody>
+      </p:sp>
+      <p:sp>
+        <p:nvSpPr>
+          <p:cNvPr id="6" name="SlideNumber"/>
           <p:cNvSpPr txBox="1"/>
           <p:nvPr/>
         </p:nvSpPr>
@@ -3909,7 +4724,74 @@
       </p:sp>
       <p:sp>
         <p:nvSpPr>
-          <p:cNvPr id="3" name="SlideNumber"/>
+          <p:cNvPr id="3" name="Body"/>
+          <p:cNvSpPr txBox="1"/>
+          <p:nvPr/>
+        </p:nvSpPr>
+        <p:spPr>
+          <a:xfrm>
+            <a:off x="502920" y="2011680"/>
+            <a:ext cx="11186160" cy="4389120"/>
+          </a:xfrm>
+          <a:prstGeom prst="rect">
+            <a:avLst/>
+          </a:prstGeom>
+          <a:noFill/>
+        </p:spPr>
+        <p:txBody>
+          <a:bodyPr wrap="square">
+            <a:spAutoFit/>
+          </a:bodyPr>
+          <a:lstStyle/>
+          <a:p>
+            <a:pPr algn="l"/>
+            <a:r>
+              <a:rPr sz="1700" b="0">
+                <a:solidFill>
+                  <a:srgbClr val="2B2B2B"/>
+                </a:solidFill>
+              </a:rPr>
+              <a:t>On foot — texture: the cut face, the water, the depth</a:t>
+            </a:r>
+          </a:p>
+          <a:p>
+            <a:pPr algn="l"/>
+            <a:r>
+              <a:rPr sz="1700" b="0">
+                <a:solidFill>
+                  <a:srgbClr val="2B2B2B"/>
+                </a:solidFill>
+              </a:rPr>
+              <a:t>From the air — boundaries: property lines standing as rock walls</a:t>
+            </a:r>
+          </a:p>
+          <a:p>
+            <a:pPr algn="l"/>
+            <a:r>
+              <a:rPr sz="1700" b="0">
+                <a:solidFill>
+                  <a:srgbClr val="2B2B2B"/>
+                </a:solidFill>
+              </a:rPr>
+              <a:t>From orbit — distribution: 145 candidates across the island</a:t>
+            </a:r>
+          </a:p>
+          <a:p>
+            <a:pPr algn="l"/>
+            <a:r>
+              <a:rPr sz="1700" b="0">
+                <a:solidFill>
+                  <a:srgbClr val="2B2B2B"/>
+                </a:solidFill>
+              </a:rPr>
+              <a:t>Not better or worse. Different things become visible.</a:t>
+            </a:r>
+          </a:p>
+        </p:txBody>
+      </p:sp>
+      <p:sp>
+        <p:nvSpPr>
+          <p:cNvPr id="4" name="SlideNumber"/>
           <p:cNvSpPr txBox="1"/>
           <p:nvPr/>
         </p:nvSpPr>
@@ -3995,7 +4877,153 @@
       </p:sp>
       <p:sp>
         <p:nvSpPr>
-          <p:cNvPr id="3" name="SlideNumber"/>
+          <p:cNvPr id="3" name="Body"/>
+          <p:cNvSpPr txBox="1"/>
+          <p:nvPr/>
+        </p:nvSpPr>
+        <p:spPr>
+          <a:xfrm>
+            <a:off x="502920" y="2011680"/>
+            <a:ext cx="2377440" cy="1005840"/>
+          </a:xfrm>
+          <a:prstGeom prst="rect">
+            <a:avLst/>
+          </a:prstGeom>
+          <a:noFill/>
+        </p:spPr>
+        <p:txBody>
+          <a:bodyPr wrap="square">
+            <a:spAutoFit/>
+          </a:bodyPr>
+          <a:lstStyle/>
+          <a:p>
+            <a:pPr algn="l"/>
+            <a:r>
+              <a:rPr sz="6600" b="1">
+                <a:solidFill>
+                  <a:srgbClr val="0D47A1"/>
+                </a:solidFill>
+              </a:rPr>
+              <a:t>5–6</a:t>
+            </a:r>
+          </a:p>
+        </p:txBody>
+      </p:sp>
+      <p:sp>
+        <p:nvSpPr>
+          <p:cNvPr id="4" name="Body"/>
+          <p:cNvSpPr txBox="1"/>
+          <p:nvPr/>
+        </p:nvSpPr>
+        <p:spPr>
+          <a:xfrm>
+            <a:off x="3429000" y="2011680"/>
+            <a:ext cx="2377440" cy="1005840"/>
+          </a:xfrm>
+          <a:prstGeom prst="rect">
+            <a:avLst/>
+          </a:prstGeom>
+          <a:noFill/>
+        </p:spPr>
+        <p:txBody>
+          <a:bodyPr wrap="square">
+            <a:spAutoFit/>
+          </a:bodyPr>
+          <a:lstStyle/>
+          <a:p>
+            <a:pPr algn="l"/>
+            <a:r>
+              <a:rPr sz="6600" b="1">
+                <a:solidFill>
+                  <a:srgbClr val="0D47A1"/>
+                </a:solidFill>
+              </a:rPr>
+              <a:t>145</a:t>
+            </a:r>
+          </a:p>
+        </p:txBody>
+      </p:sp>
+      <p:sp>
+        <p:nvSpPr>
+          <p:cNvPr id="5" name="Body"/>
+          <p:cNvSpPr txBox="1"/>
+          <p:nvPr/>
+        </p:nvSpPr>
+        <p:spPr>
+          <a:xfrm>
+            <a:off x="502920" y="3200400"/>
+            <a:ext cx="11186160" cy="2743200"/>
+          </a:xfrm>
+          <a:prstGeom prst="rect">
+            <a:avLst/>
+          </a:prstGeom>
+          <a:noFill/>
+        </p:spPr>
+        <p:txBody>
+          <a:bodyPr wrap="square">
+            <a:spAutoFit/>
+          </a:bodyPr>
+          <a:lstStyle/>
+          <a:p>
+            <a:pPr algn="l"/>
+            <a:r>
+              <a:rPr sz="1700" b="0">
+                <a:solidFill>
+                  <a:srgbClr val="2B2B2B"/>
+                </a:solidFill>
+              </a:rPr>
+              <a:t>Five or six quarry sites visited during the event</a:t>
+            </a:r>
+          </a:p>
+          <a:p>
+            <a:pPr algn="l"/>
+            <a:r>
+              <a:rPr sz="1700" b="0">
+                <a:solidFill>
+                  <a:srgbClr val="2B2B2B"/>
+                </a:solidFill>
+              </a:rPr>
+              <a:t>145 water polygons detected from one scene</a:t>
+            </a:r>
+          </a:p>
+          <a:p>
+            <a:pPr algn="l"/>
+            <a:r>
+              <a:rPr sz="1700" b="0">
+                <a:solidFill>
+                  <a:srgbClr val="2B2B2B"/>
+                </a:solidFill>
+              </a:rPr>
+              <a:t>Individual ponds are not field-confirmed — no precision or recall yet</a:t>
+            </a:r>
+          </a:p>
+          <a:p>
+            <a:pPr algn="l"/>
+            <a:r>
+              <a:rPr sz="1700" b="0">
+                <a:solidFill>
+                  <a:srgbClr val="2B2B2B"/>
+                </a:solidFill>
+              </a:rPr>
+              <a:t>Every quarry feature already mapped in OpenStreetMap overlaps one of the detections (retrieved 2026-08-23, for reference)</a:t>
+            </a:r>
+          </a:p>
+          <a:p>
+            <a:pPr algn="l"/>
+            <a:r>
+              <a:rPr sz="1700" b="0">
+                <a:solidFill>
+                  <a:srgbClr val="2B2B2B"/>
+                </a:solidFill>
+              </a:rPr>
+              <a:t>The candidates form a finite field-check list.</a:t>
+            </a:r>
+          </a:p>
+        </p:txBody>
+      </p:sp>
+      <p:sp>
+        <p:nvSpPr>
+          <p:cNvPr id="6" name="SlideNumber"/>
           <p:cNvSpPr txBox="1"/>
           <p:nvPr/>
         </p:nvSpPr>
@@ -4081,7 +5109,74 @@
       </p:sp>
       <p:sp>
         <p:nvSpPr>
-          <p:cNvPr id="3" name="SlideNumber"/>
+          <p:cNvPr id="3" name="Body"/>
+          <p:cNvSpPr txBox="1"/>
+          <p:nvPr/>
+        </p:nvSpPr>
+        <p:spPr>
+          <a:xfrm>
+            <a:off x="502920" y="2011680"/>
+            <a:ext cx="11186160" cy="4389120"/>
+          </a:xfrm>
+          <a:prstGeom prst="rect">
+            <a:avLst/>
+          </a:prstGeom>
+          <a:noFill/>
+        </p:spPr>
+        <p:txBody>
+          <a:bodyPr wrap="square">
+            <a:spAutoFit/>
+          </a:bodyPr>
+          <a:lstStyle/>
+          <a:p>
+            <a:pPr algn="l"/>
+            <a:r>
+              <a:rPr sz="1700" b="0">
+                <a:solidFill>
+                  <a:srgbClr val="2B2B2B"/>
+                </a:solidFill>
+              </a:rPr>
+              <a:t>2026-08-31 — return visit</a:t>
+            </a:r>
+          </a:p>
+          <a:p>
+            <a:pPr algn="l"/>
+            <a:r>
+              <a:rPr sz="1700" b="0">
+                <a:solidFill>
+                  <a:srgbClr val="2B2B2B"/>
+                </a:solidFill>
+              </a:rPr>
+              <a:t>Candidates selected from the published GeoJSON</a:t>
+            </a:r>
+          </a:p>
+          <a:p>
+            <a:pPr algn="l"/>
+            <a:r>
+              <a:rPr sz="1700" b="0">
+                <a:solidFill>
+                  <a:srgbClr val="2B2B2B"/>
+                </a:solidFill>
+              </a:rPr>
+              <a:t>Illustrative field photographs — not accuracy validation</a:t>
+            </a:r>
+          </a:p>
+          <a:p>
+            <a:pPr algn="l"/>
+            <a:r>
+              <a:rPr sz="1700" b="0">
+                <a:solidFill>
+                  <a:srgbClr val="2B2B2B"/>
+                </a:solidFill>
+              </a:rPr>
+              <a:t>What the scan pointed at, seen from the ground.</a:t>
+            </a:r>
+          </a:p>
+        </p:txBody>
+      </p:sp>
+      <p:sp>
+        <p:nvSpPr>
+          <p:cNvPr id="4" name="SlideNumber"/>
           <p:cNvSpPr txBox="1"/>
           <p:nvPr/>
         </p:nvSpPr>
